--- a/packages/templates/files/deck-training.pptx
+++ b/packages/templates/files/deck-training.pptx
@@ -107,9 +107,9 @@
             </a:lvl1pPr>
           </a:lstStyle>
           <a:p>
-            <a:fld id="{7E2E374E-3C58-4013-A5AE-96493482479F}" type="datetimeFigureOut">
-              <a:rPr lang="en-US"/>
-              <a:t>10/13/2026</a:t>
+            <a:fld id="{73479346-F086-4303-87ED-C13A1B8D0EE1}" type="datetimeFigureOut">
+              <a:rPr lang="en-US"/>
+              <a:t>10/21/2026</a:t>
             </a:fld>
             <a:endParaRPr lang="en-US"/>
           </a:p>
@@ -265,7 +265,7 @@
             </a:lvl1pPr>
           </a:lstStyle>
           <a:p>
-            <a:fld id="{8EC43F10-9838-4949-8F92-6F11F13EDD2E}" type="slidenum">
+            <a:fld id="{1B4BBD1E-B1E4-45B8-A448-9F61DBDD9F61}" type="slidenum">
               <a:rPr lang="en-US"/>
               <a:t>‹#›</a:t>
             </a:fld>
@@ -1409,7 +1409,7 @@
           <a:lstStyle/>
           <a:p>
             <a:pPr algn="r"/>
-            <a:fld id="{0B8AFAFA-811F-6F85-9A30-BBA29346BABE}" type="slidenum">
+            <a:fld id="{4DA72067-8092-CA0A-B808-DF9170AAF15D}" type="slidenum">
               <a:rPr lang="en-US"/>
               <a:t>2</a:t>
             </a:fld>
@@ -1697,7 +1697,7 @@
           <a:lstStyle/>
           <a:p>
             <a:pPr algn="r"/>
-            <a:fld id="{E8F3E160-4325-51A3-A91C-19A8E6C74FC5}" type="slidenum">
+            <a:fld id="{24671D62-7DEC-9D7D-5B49-20209A7A85B1}" type="slidenum">
               <a:rPr lang="en-US"/>
               <a:t>3</a:t>
             </a:fld>
@@ -1797,7 +1797,7 @@
           <a:lstStyle/>
           <a:p>
             <a:pPr algn="r"/>
-            <a:fld id="{61E328EF-0384-11BC-D0A1-448EC607D716}" type="slidenum">
+            <a:fld id="{08ECB01F-A448-B0D4-7B94-1162ADBE6DAC}" type="slidenum">
               <a:rPr lang="en-US"/>
               <a:t>4</a:t>
             </a:fld>
@@ -1909,7 +1909,7 @@
           <a:lstStyle/>
           <a:p>
             <a:pPr algn="r"/>
-            <a:fld id="{56109C4B-988F-D0A3-6078-B31D10E2CC71}" type="slidenum">
+            <a:fld id="{0B0DBCFA-631F-4707-C8C7-9ECDAFD981BD}" type="slidenum">
               <a:rPr lang="en-US"/>
               <a:t>5</a:t>
             </a:fld>
@@ -2175,7 +2175,7 @@
           <a:lstStyle/>
           <a:p>
             <a:pPr algn="r"/>
-            <a:fld id="{E1906420-FE08-7171-2DAD-5F17530EE695}" type="slidenum">
+            <a:fld id="{F35DA124-2EA9-B57B-BA37-10EBB515FB47}" type="slidenum">
               <a:rPr lang="en-US"/>
               <a:t>6</a:t>
             </a:fld>
@@ -2296,7 +2296,7 @@
           <a:lstStyle/>
           <a:p>
             <a:pPr algn="r"/>
-            <a:fld id="{2F51D267-9183-918C-B4FB-5F1F93AAD457}" type="slidenum">
+            <a:fld id="{EEEB3FBE-C75B-3133-B912-29B103F2B480}" type="slidenum">
               <a:rPr lang="en-US"/>
               <a:t>7</a:t>
             </a:fld>
@@ -2408,7 +2408,7 @@
           <a:lstStyle/>
           <a:p>
             <a:pPr algn="r"/>
-            <a:fld id="{697E41B7-0968-540D-F0B8-C4E5467A4B5A}" type="slidenum">
+            <a:fld id="{9A219D8B-B49B-70E0-7870-31D53D1295ED}" type="slidenum">
               <a:rPr lang="en-US"/>
               <a:t>8</a:t>
             </a:fld>
